--- a/assets/powerpoints/module-alimentation/E2-je-retiens-des-mots.pptx
+++ b/assets/powerpoints/module-alimentation/E2-je-retiens-des-mots.pptx
@@ -4290,7 +4290,7 @@
             <a:r>
               <a:rPr sz="1300" b="1" i="0" spc="156">
                 <a:solidFill>
-                  <a:srgbClr val="166534"/>
+                  <a:srgbClr val="A5335F"/>
                 </a:solidFill>
                 <a:latin typeface="Verdana"/>
               </a:rPr>
@@ -4630,7 +4630,7 @@
             <a:r>
               <a:rPr sz="1300" b="1" i="0" spc="156">
                 <a:solidFill>
-                  <a:srgbClr val="166534"/>
+                  <a:srgbClr val="A5335F"/>
                 </a:solidFill>
                 <a:latin typeface="Verdana"/>
               </a:rPr>
@@ -4754,7 +4754,7 @@
             <a:r>
               <a:rPr sz="2100" b="1" i="0">
                 <a:solidFill>
-                  <a:srgbClr val="166534"/>
+                  <a:srgbClr val="A5335F"/>
                 </a:solidFill>
                 <a:latin typeface="Verdana"/>
               </a:rPr>
@@ -4878,7 +4878,7 @@
             <a:r>
               <a:rPr sz="2100" b="1" i="0">
                 <a:solidFill>
-                  <a:srgbClr val="166534"/>
+                  <a:srgbClr val="A5335F"/>
                 </a:solidFill>
                 <a:latin typeface="Verdana"/>
               </a:rPr>
@@ -5002,7 +5002,7 @@
             <a:r>
               <a:rPr sz="2100" b="1" i="0">
                 <a:solidFill>
-                  <a:srgbClr val="166534"/>
+                  <a:srgbClr val="A5335F"/>
                 </a:solidFill>
                 <a:latin typeface="Verdana"/>
               </a:rPr>
@@ -5764,7 +5764,7 @@
             <a:r>
               <a:rPr sz="1300" b="1" i="0" spc="156">
                 <a:solidFill>
-                  <a:srgbClr val="166534"/>
+                  <a:srgbClr val="A5335F"/>
                 </a:solidFill>
                 <a:latin typeface="Verdana"/>
               </a:rPr>
@@ -5875,7 +5875,7 @@
             </a:avLst>
           </a:prstGeom>
           <a:solidFill>
-            <a:srgbClr val="E3F1E7"/>
+            <a:srgbClr val="FCE9F0"/>
           </a:solidFill>
           <a:ln>
             <a:noFill/>
@@ -5932,7 +5932,7 @@
             <a:r>
               <a:rPr sz="1500" b="1" i="0">
                 <a:solidFill>
-                  <a:srgbClr val="166534"/>
+                  <a:srgbClr val="A5335F"/>
                 </a:solidFill>
                 <a:latin typeface="Verdana"/>
               </a:rPr>
@@ -6043,7 +6043,7 @@
             </a:avLst>
           </a:prstGeom>
           <a:solidFill>
-            <a:srgbClr val="E3F1E7"/>
+            <a:srgbClr val="FCE9F0"/>
           </a:solidFill>
           <a:ln>
             <a:noFill/>
@@ -6100,7 +6100,7 @@
             <a:r>
               <a:rPr sz="1500" b="1" i="0">
                 <a:solidFill>
-                  <a:srgbClr val="166534"/>
+                  <a:srgbClr val="A5335F"/>
                 </a:solidFill>
                 <a:latin typeface="Verdana"/>
               </a:rPr>
@@ -6211,7 +6211,7 @@
             </a:avLst>
           </a:prstGeom>
           <a:solidFill>
-            <a:srgbClr val="E3F1E7"/>
+            <a:srgbClr val="FCE9F0"/>
           </a:solidFill>
           <a:ln>
             <a:noFill/>
@@ -6268,7 +6268,7 @@
             <a:r>
               <a:rPr sz="1500" b="1" i="0">
                 <a:solidFill>
-                  <a:srgbClr val="166534"/>
+                  <a:srgbClr val="A5335F"/>
                 </a:solidFill>
                 <a:latin typeface="Verdana"/>
               </a:rPr>
@@ -6379,7 +6379,7 @@
             </a:avLst>
           </a:prstGeom>
           <a:solidFill>
-            <a:srgbClr val="E3F1E7"/>
+            <a:srgbClr val="FCE9F0"/>
           </a:solidFill>
           <a:ln>
             <a:noFill/>
@@ -6436,7 +6436,7 @@
             <a:r>
               <a:rPr sz="1500" b="1" i="0">
                 <a:solidFill>
-                  <a:srgbClr val="166534"/>
+                  <a:srgbClr val="A5335F"/>
                 </a:solidFill>
                 <a:latin typeface="Verdana"/>
               </a:rPr>
@@ -6652,7 +6652,7 @@
             <a:r>
               <a:rPr sz="1300" b="1" i="0" spc="156">
                 <a:solidFill>
-                  <a:srgbClr val="166534"/>
+                  <a:srgbClr val="A5335F"/>
                 </a:solidFill>
                 <a:latin typeface="Verdana"/>
               </a:rPr>
@@ -7472,7 +7472,7 @@
             <a:r>
               <a:rPr sz="1300" b="1" i="0" spc="156">
                 <a:solidFill>
-                  <a:srgbClr val="166534"/>
+                  <a:srgbClr val="A5335F"/>
                 </a:solidFill>
                 <a:latin typeface="Verdana"/>
               </a:rPr>
@@ -8292,7 +8292,7 @@
             <a:r>
               <a:rPr sz="1300" b="1" i="0" spc="156">
                 <a:solidFill>
-                  <a:srgbClr val="166534"/>
+                  <a:srgbClr val="A5335F"/>
                 </a:solidFill>
                 <a:latin typeface="Verdana"/>
               </a:rPr>
@@ -9112,7 +9112,7 @@
             <a:r>
               <a:rPr sz="1300" b="1" i="0" spc="156">
                 <a:solidFill>
-                  <a:srgbClr val="166534"/>
+                  <a:srgbClr val="A5335F"/>
                 </a:solidFill>
                 <a:latin typeface="Verdana"/>
               </a:rPr>
@@ -9932,7 +9932,7 @@
             <a:r>
               <a:rPr sz="1300" b="1" i="0" spc="156">
                 <a:solidFill>
-                  <a:srgbClr val="166534"/>
+                  <a:srgbClr val="A5335F"/>
                 </a:solidFill>
                 <a:latin typeface="Verdana"/>
               </a:rPr>
@@ -10173,7 +10173,7 @@
             <a:r>
               <a:rPr sz="1800" b="1" i="0">
                 <a:solidFill>
-                  <a:srgbClr val="166534"/>
+                  <a:srgbClr val="A5335F"/>
                 </a:solidFill>
                 <a:latin typeface="Verdana"/>
               </a:rPr>
@@ -10293,7 +10293,7 @@
             <a:r>
               <a:rPr sz="1800" b="1" i="0">
                 <a:solidFill>
-                  <a:srgbClr val="166534"/>
+                  <a:srgbClr val="A5335F"/>
                 </a:solidFill>
                 <a:latin typeface="Verdana"/>
               </a:rPr>
@@ -10413,7 +10413,7 @@
             <a:r>
               <a:rPr sz="1800" b="1" i="0">
                 <a:solidFill>
-                  <a:srgbClr val="166534"/>
+                  <a:srgbClr val="A5335F"/>
                 </a:solidFill>
                 <a:latin typeface="Verdana"/>
               </a:rPr>
@@ -10675,7 +10675,7 @@
             <a:r>
               <a:rPr sz="1300" b="1" i="0" spc="156">
                 <a:solidFill>
-                  <a:srgbClr val="166534"/>
+                  <a:srgbClr val="A5335F"/>
                 </a:solidFill>
                 <a:latin typeface="Verdana"/>
               </a:rPr>
@@ -10916,7 +10916,7 @@
             <a:r>
               <a:rPr sz="1800" b="1" i="0">
                 <a:solidFill>
-                  <a:srgbClr val="166534"/>
+                  <a:srgbClr val="A5335F"/>
                 </a:solidFill>
                 <a:latin typeface="Verdana"/>
               </a:rPr>
@@ -11036,7 +11036,7 @@
             <a:r>
               <a:rPr sz="1800" b="1" i="0">
                 <a:solidFill>
-                  <a:srgbClr val="166534"/>
+                  <a:srgbClr val="A5335F"/>
                 </a:solidFill>
                 <a:latin typeface="Verdana"/>
               </a:rPr>
@@ -11156,7 +11156,7 @@
             <a:r>
               <a:rPr sz="1800" b="1" i="0">
                 <a:solidFill>
-                  <a:srgbClr val="166534"/>
+                  <a:srgbClr val="A5335F"/>
                 </a:solidFill>
                 <a:latin typeface="Verdana"/>
               </a:rPr>
@@ -11276,7 +11276,7 @@
             <a:r>
               <a:rPr sz="1800" b="1" i="0">
                 <a:solidFill>
-                  <a:srgbClr val="166534"/>
+                  <a:srgbClr val="A5335F"/>
                 </a:solidFill>
                 <a:latin typeface="Verdana"/>
               </a:rPr>
@@ -11453,7 +11453,7 @@
             <a:r>
               <a:rPr sz="1300" b="1" i="0" spc="156">
                 <a:solidFill>
-                  <a:srgbClr val="166534"/>
+                  <a:srgbClr val="A5335F"/>
                 </a:solidFill>
                 <a:latin typeface="Verdana"/>
               </a:rPr>
@@ -11479,7 +11479,7 @@
             </a:avLst>
           </a:prstGeom>
           <a:solidFill>
-            <a:srgbClr val="E3F1E7"/>
+            <a:srgbClr val="FCE9F0"/>
           </a:solidFill>
           <a:ln w="12700">
             <a:solidFill>

--- a/assets/powerpoints/module-alimentation/E2-je-retiens-des-mots.pptx
+++ b/assets/powerpoints/module-alimentation/E2-je-retiens-des-mots.pptx
@@ -5045,7 +5045,7 @@
                 </a:solidFill>
                 <a:latin typeface="Verdana"/>
               </a:rPr>
-              <a:t>Sept panneaux « En apprendre plus », avec de l'audio. Ils restent accessibles après la fin du module.</a:t>
+              <a:t>Sept panneaux « Ouvrir la mini-leçon », avec de l'audio. Ils restent accessibles après la fin du module.</a:t>
             </a:r>
           </a:p>
         </p:txBody>
